--- a/index/designs/y7-l11/l5-sentence-patterns/l5-sentence-patterns.pptx
+++ b/index/designs/y7-l11/l5-sentence-patterns/l5-sentence-patterns.pptx
@@ -2137,12 +2137,6 @@
               </a:rPr>
               <a:t>陈述 </a:t>
             </a:r>
-            <a:pPr algn="ctr" indent="0" marL="0">
-              <a:spcBef>
-                <a:spcPts val="800"/>
-              </a:spcBef>
-              <a:buNone/>
-            </a:pPr>
             <a:r>
               <a:rPr lang="en-US" sz="4400" b="1" dirty="0">
                 <a:solidFill>
@@ -2154,12 +2148,6 @@
               </a:rPr>
               <a:t>⇆</a:t>
             </a:r>
-            <a:pPr algn="ctr" indent="0" marL="0">
-              <a:spcBef>
-                <a:spcPts val="800"/>
-              </a:spcBef>
-              <a:buNone/>
-            </a:pPr>
             <a:r>
               <a:rPr lang="en-US" sz="4400" dirty="0">
                 <a:solidFill>
@@ -4211,12 +4199,6 @@
               </a:rPr>
               <a:t>你们几点下午放学？</a:t>
             </a:r>
-            <a:pPr algn="l" indent="0" marL="0">
-              <a:spcBef>
-                <a:spcPts val="300"/>
-              </a:spcBef>
-              <a:buNone/>
-            </a:pPr>
             <a:r>
               <a:rPr lang="en-US" sz="1100" dirty="0">
                 <a:solidFill>
@@ -4228,12 +4210,6 @@
               </a:rPr>
               <a:t> → </a:t>
             </a:r>
-            <a:pPr algn="l" indent="0" marL="0">
-              <a:spcBef>
-                <a:spcPts val="300"/>
-              </a:spcBef>
-              <a:buNone/>
-            </a:pPr>
             <a:r>
               <a:rPr lang="en-US" sz="1100" b="1" dirty="0">
                 <a:solidFill>
@@ -4400,12 +4376,6 @@
               </a:rPr>
               <a:t>我早上六点半起了床。</a:t>
             </a:r>
-            <a:pPr algn="l" indent="0" marL="0">
-              <a:spcBef>
-                <a:spcPts val="300"/>
-              </a:spcBef>
-              <a:buNone/>
-            </a:pPr>
             <a:r>
               <a:rPr lang="en-US" sz="1100" dirty="0">
                 <a:solidFill>
@@ -4417,12 +4387,6 @@
               </a:rPr>
               <a:t> → </a:t>
             </a:r>
-            <a:pPr algn="l" indent="0" marL="0">
-              <a:spcBef>
-                <a:spcPts val="300"/>
-              </a:spcBef>
-              <a:buNone/>
-            </a:pPr>
             <a:r>
               <a:rPr lang="en-US" sz="1100" b="1" dirty="0">
                 <a:solidFill>
@@ -4589,12 +4553,6 @@
               </a:rPr>
               <a:t>他晚上上午睡觉。</a:t>
             </a:r>
-            <a:pPr algn="l" indent="0" marL="0">
-              <a:spcBef>
-                <a:spcPts val="300"/>
-              </a:spcBef>
-              <a:buNone/>
-            </a:pPr>
             <a:r>
               <a:rPr lang="en-US" sz="1100" dirty="0">
                 <a:solidFill>
@@ -4606,12 +4564,6 @@
               </a:rPr>
               <a:t> → </a:t>
             </a:r>
-            <a:pPr algn="l" indent="0" marL="0">
-              <a:spcBef>
-                <a:spcPts val="300"/>
-              </a:spcBef>
-              <a:buNone/>
-            </a:pPr>
             <a:r>
               <a:rPr lang="en-US" sz="1100" b="1" dirty="0">
                 <a:solidFill>
@@ -4778,12 +4730,6 @@
               </a:rPr>
               <a:t>你几点几点吃早饭？</a:t>
             </a:r>
-            <a:pPr algn="l" indent="0" marL="0">
-              <a:spcBef>
-                <a:spcPts val="300"/>
-              </a:spcBef>
-              <a:buNone/>
-            </a:pPr>
             <a:r>
               <a:rPr lang="en-US" sz="1100" dirty="0">
                 <a:solidFill>
@@ -4795,12 +4741,6 @@
               </a:rPr>
               <a:t> → </a:t>
             </a:r>
-            <a:pPr algn="l" indent="0" marL="0">
-              <a:spcBef>
-                <a:spcPts val="300"/>
-              </a:spcBef>
-              <a:buNone/>
-            </a:pPr>
             <a:r>
               <a:rPr lang="en-US" sz="1100" b="1" dirty="0">
                 <a:solidFill>
@@ -4967,12 +4907,6 @@
               </a:rPr>
               <a:t>我们下午三点半上学。</a:t>
             </a:r>
-            <a:pPr algn="l" indent="0" marL="0">
-              <a:spcBef>
-                <a:spcPts val="300"/>
-              </a:spcBef>
-              <a:buNone/>
-            </a:pPr>
             <a:r>
               <a:rPr lang="en-US" sz="1100" dirty="0">
                 <a:solidFill>
@@ -4984,12 +4918,6 @@
               </a:rPr>
               <a:t> → </a:t>
             </a:r>
-            <a:pPr algn="l" indent="0" marL="0">
-              <a:spcBef>
-                <a:spcPts val="300"/>
-              </a:spcBef>
-              <a:buNone/>
-            </a:pPr>
             <a:r>
               <a:rPr lang="en-US" sz="1100" b="1" dirty="0">
                 <a:solidFill>
@@ -5156,12 +5084,6 @@
               </a:rPr>
               <a:t>她早上七点半上课上学。</a:t>
             </a:r>
-            <a:pPr algn="l" indent="0" marL="0">
-              <a:spcBef>
-                <a:spcPts val="300"/>
-              </a:spcBef>
-              <a:buNone/>
-            </a:pPr>
             <a:r>
               <a:rPr lang="en-US" sz="1100" dirty="0">
                 <a:solidFill>
@@ -5173,12 +5095,6 @@
               </a:rPr>
               <a:t> → </a:t>
             </a:r>
-            <a:pPr algn="l" indent="0" marL="0">
-              <a:spcBef>
-                <a:spcPts val="300"/>
-              </a:spcBef>
-              <a:buNone/>
-            </a:pPr>
             <a:r>
               <a:rPr lang="en-US" sz="1100" b="1" dirty="0">
                 <a:solidFill>
@@ -6186,15 +6102,6 @@
               </a:rPr>
               <a:t>You can now turn a routine statement into a question — and describe </a:t>
             </a:r>
-            <a:pPr algn="ctr" indent="0" marL="0">
-              <a:lnSpc>
-                <a:spcPts val="1650"/>
-              </a:lnSpc>
-              <a:spcBef>
-                <a:spcPts val="400"/>
-              </a:spcBef>
-              <a:buNone/>
-            </a:pPr>
             <a:r>
               <a:rPr lang="en-US" sz="1100" b="1" dirty="0">
                 <a:solidFill>
@@ -6206,15 +6113,6 @@
               </a:rPr>
               <a:t>someone else's</a:t>
             </a:r>
-            <a:pPr algn="ctr" indent="0" marL="0">
-              <a:lnSpc>
-                <a:spcPts val="1650"/>
-              </a:lnSpc>
-              <a:spcBef>
-                <a:spcPts val="400"/>
-              </a:spcBef>
-              <a:buNone/>
-            </a:pPr>
             <a:r>
               <a:rPr lang="en-US" sz="1100" dirty="0">
                 <a:solidFill>
@@ -6430,15 +6328,6 @@
               </a:rPr>
               <a:t>Today: </a:t>
             </a:r>
-            <a:pPr algn="ctr" indent="0" marL="0">
-              <a:lnSpc>
-                <a:spcPts val="1650"/>
-              </a:lnSpc>
-              <a:spcBef>
-                <a:spcPts val="1600"/>
-              </a:spcBef>
-              <a:buNone/>
-            </a:pPr>
             <a:r>
               <a:rPr lang="en-US" sz="1100" b="1" dirty="0">
                 <a:solidFill>
@@ -6450,15 +6339,6 @@
               </a:rPr>
               <a:t>陈述句 (statements)</a:t>
             </a:r>
-            <a:pPr algn="ctr" indent="0" marL="0">
-              <a:lnSpc>
-                <a:spcPts val="1650"/>
-              </a:lnSpc>
-              <a:spcBef>
-                <a:spcPts val="1600"/>
-              </a:spcBef>
-              <a:buNone/>
-            </a:pPr>
             <a:r>
               <a:rPr lang="en-US" sz="1100" dirty="0">
                 <a:solidFill>
@@ -6470,15 +6350,6 @@
               </a:rPr>
               <a:t> ⇆ </a:t>
             </a:r>
-            <a:pPr algn="ctr" indent="0" marL="0">
-              <a:lnSpc>
-                <a:spcPts val="1650"/>
-              </a:lnSpc>
-              <a:spcBef>
-                <a:spcPts val="1600"/>
-              </a:spcBef>
-              <a:buNone/>
-            </a:pPr>
             <a:r>
               <a:rPr lang="en-US" sz="1100" b="1" dirty="0">
                 <a:solidFill>
@@ -6490,15 +6361,6 @@
               </a:rPr>
               <a:t>疑问句 (questions)</a:t>
             </a:r>
-            <a:pPr algn="ctr" indent="0" marL="0">
-              <a:lnSpc>
-                <a:spcPts val="1650"/>
-              </a:lnSpc>
-              <a:spcBef>
-                <a:spcPts val="1600"/>
-              </a:spcBef>
-              <a:buNone/>
-            </a:pPr>
             <a:r>
               <a:rPr lang="en-US" sz="1100" dirty="0">
                 <a:solidFill>
@@ -8031,9 +7893,6 @@
               </a:rPr>
               <a:t>We are learning to turn a </a:t>
             </a:r>
-            <a:pPr algn="l" indent="0" marL="0">
-              <a:buNone/>
-            </a:pPr>
             <a:r>
               <a:rPr lang="en-US" sz="1400" b="1" dirty="0">
                 <a:solidFill>
@@ -8045,9 +7904,6 @@
               </a:rPr>
               <a:t>daily-routine statement</a:t>
             </a:r>
-            <a:pPr algn="l" indent="0" marL="0">
-              <a:buNone/>
-            </a:pPr>
             <a:r>
               <a:rPr lang="en-US" sz="1400" dirty="0">
                 <a:solidFill>
@@ -8059,9 +7915,6 @@
               </a:rPr>
               <a:t> into a </a:t>
             </a:r>
-            <a:pPr algn="l" indent="0" marL="0">
-              <a:buNone/>
-            </a:pPr>
             <a:r>
               <a:rPr lang="en-US" sz="1400" b="1" dirty="0">
                 <a:solidFill>
@@ -8073,9 +7926,6 @@
               </a:rPr>
               <a:t>question</a:t>
             </a:r>
-            <a:pPr algn="l" indent="0" marL="0">
-              <a:buNone/>
-            </a:pPr>
             <a:r>
               <a:rPr lang="en-US" sz="1400" dirty="0">
                 <a:solidFill>
@@ -8165,9 +8015,6 @@
               </a:rPr>
               <a:t>I can say a daily-routine </a:t>
             </a:r>
-            <a:pPr algn="l" indent="0" marL="0">
-              <a:buNone/>
-            </a:pPr>
             <a:r>
               <a:rPr lang="en-US" sz="1200" b="1" dirty="0">
                 <a:solidFill>
@@ -8179,9 +8026,6 @@
               </a:rPr>
               <a:t>statement</a:t>
             </a:r>
-            <a:pPr algn="l" indent="0" marL="0">
-              <a:buNone/>
-            </a:pPr>
             <a:r>
               <a:rPr lang="en-US" sz="1200" dirty="0">
                 <a:solidFill>
@@ -8193,9 +8037,6 @@
               </a:rPr>
               <a:t> using </a:t>
             </a:r>
-            <a:pPr algn="l" indent="0" marL="0">
-              <a:buNone/>
-            </a:pPr>
             <a:r>
               <a:rPr lang="en-US" sz="1200" b="1" dirty="0">
                 <a:solidFill>
@@ -8207,9 +8048,6 @@
               </a:rPr>
               <a:t>我/我们 + time + verb</a:t>
             </a:r>
-            <a:pPr algn="l" indent="0" marL="0">
-              <a:buNone/>
-            </a:pPr>
             <a:r>
               <a:rPr lang="en-US" sz="1200" dirty="0">
                 <a:solidFill>
@@ -8221,9 +8059,6 @@
               </a:rPr>
               <a:t>. </a:t>
             </a:r>
-            <a:pPr algn="l" indent="0" marL="0">
-              <a:buNone/>
-            </a:pPr>
             <a:r>
               <a:rPr lang="en-US" sz="900" dirty="0">
                 <a:solidFill>
@@ -8313,9 +8148,6 @@
               </a:rPr>
               <a:t>I can ask a daily-routine </a:t>
             </a:r>
-            <a:pPr algn="l" indent="0" marL="0">
-              <a:buNone/>
-            </a:pPr>
             <a:r>
               <a:rPr lang="en-US" sz="1200" b="1" dirty="0">
                 <a:solidFill>
@@ -8327,9 +8159,6 @@
               </a:rPr>
               <a:t>question</a:t>
             </a:r>
-            <a:pPr algn="l" indent="0" marL="0">
-              <a:buNone/>
-            </a:pPr>
             <a:r>
               <a:rPr lang="en-US" sz="1200" dirty="0">
                 <a:solidFill>
@@ -8341,9 +8170,6 @@
               </a:rPr>
               <a:t> using </a:t>
             </a:r>
-            <a:pPr algn="l" indent="0" marL="0">
-              <a:buNone/>
-            </a:pPr>
             <a:r>
               <a:rPr lang="en-US" sz="1200" b="1" dirty="0">
                 <a:solidFill>
@@ -8355,9 +8181,6 @@
               </a:rPr>
               <a:t>几点</a:t>
             </a:r>
-            <a:pPr algn="l" indent="0" marL="0">
-              <a:buNone/>
-            </a:pPr>
             <a:r>
               <a:rPr lang="en-US" sz="1200" dirty="0">
                 <a:solidFill>
@@ -8369,9 +8192,6 @@
               </a:rPr>
               <a:t>. </a:t>
             </a:r>
-            <a:pPr algn="l" indent="0" marL="0">
-              <a:buNone/>
-            </a:pPr>
             <a:r>
               <a:rPr lang="en-US" sz="900" dirty="0">
                 <a:solidFill>
@@ -8461,9 +8281,6 @@
               </a:rPr>
               <a:t>I can describe </a:t>
             </a:r>
-            <a:pPr algn="l" indent="0" marL="0">
-              <a:buNone/>
-            </a:pPr>
             <a:r>
               <a:rPr lang="en-US" sz="1200" b="1" dirty="0">
                 <a:solidFill>
@@ -8475,9 +8292,6 @@
               </a:rPr>
               <a:t>someone else's</a:t>
             </a:r>
-            <a:pPr algn="l" indent="0" marL="0">
-              <a:buNone/>
-            </a:pPr>
             <a:r>
               <a:rPr lang="en-US" sz="1200" dirty="0">
                 <a:solidFill>
@@ -8489,9 +8303,6 @@
               </a:rPr>
               <a:t> routine from a picture using </a:t>
             </a:r>
-            <a:pPr algn="l" indent="0" marL="0">
-              <a:buNone/>
-            </a:pPr>
             <a:r>
               <a:rPr lang="en-US" sz="1200" b="1" dirty="0">
                 <a:solidFill>
@@ -8503,9 +8314,6 @@
               </a:rPr>
               <a:t>他/她</a:t>
             </a:r>
-            <a:pPr algn="l" indent="0" marL="0">
-              <a:buNone/>
-            </a:pPr>
             <a:r>
               <a:rPr lang="en-US" sz="1200" dirty="0">
                 <a:solidFill>
@@ -8517,9 +8325,6 @@
               </a:rPr>
               <a:t>. </a:t>
             </a:r>
-            <a:pPr algn="l" indent="0" marL="0">
-              <a:buNone/>
-            </a:pPr>
             <a:r>
               <a:rPr lang="en-US" sz="900" dirty="0">
                 <a:solidFill>
@@ -8871,9 +8676,6 @@
               </a:rPr>
               <a:t>我</a:t>
             </a:r>
-            <a:pPr algn="l" indent="0" marL="0">
-              <a:buNone/>
-            </a:pPr>
             <a:r>
               <a:rPr lang="en-US" sz="1100" b="1" dirty="0">
                 <a:solidFill>
@@ -8885,9 +8687,6 @@
               </a:rPr>
               <a:t>/</a:t>
             </a:r>
-            <a:pPr algn="l" indent="0" marL="0">
-              <a:buNone/>
-            </a:pPr>
             <a:r>
               <a:rPr lang="en-US" sz="1500" dirty="0">
                 <a:solidFill>
@@ -8899,9 +8698,6 @@
               </a:rPr>
               <a:t>我们 </a:t>
             </a:r>
-            <a:pPr algn="l" indent="0" marL="0">
-              <a:buNone/>
-            </a:pPr>
             <a:r>
               <a:rPr lang="en-US" sz="1100" b="1" dirty="0">
                 <a:solidFill>
@@ -8913,9 +8709,6 @@
               </a:rPr>
               <a:t>+</a:t>
             </a:r>
-            <a:pPr algn="l" indent="0" marL="0">
-              <a:buNone/>
-            </a:pPr>
             <a:r>
               <a:rPr lang="en-US" sz="1500" dirty="0">
                 <a:solidFill>
@@ -8927,9 +8720,6 @@
               </a:rPr>
               <a:t> </a:t>
             </a:r>
-            <a:pPr algn="l" indent="0" marL="0">
-              <a:buNone/>
-            </a:pPr>
             <a:r>
               <a:rPr lang="en-US" sz="1500" b="1" dirty="0">
                 <a:solidFill>
@@ -8941,9 +8731,6 @@
               </a:rPr>
               <a:t>时间</a:t>
             </a:r>
-            <a:pPr algn="l" indent="0" marL="0">
-              <a:buNone/>
-            </a:pPr>
             <a:r>
               <a:rPr lang="en-US" sz="1500" dirty="0">
                 <a:solidFill>
@@ -8955,9 +8742,6 @@
               </a:rPr>
               <a:t> </a:t>
             </a:r>
-            <a:pPr algn="l" indent="0" marL="0">
-              <a:buNone/>
-            </a:pPr>
             <a:r>
               <a:rPr lang="en-US" sz="1100" b="1" dirty="0">
                 <a:solidFill>
@@ -8969,9 +8753,6 @@
               </a:rPr>
               <a:t>+</a:t>
             </a:r>
-            <a:pPr algn="l" indent="0" marL="0">
-              <a:buNone/>
-            </a:pPr>
             <a:r>
               <a:rPr lang="en-US" sz="1500" dirty="0">
                 <a:solidFill>
@@ -9054,9 +8835,6 @@
               </a:rPr>
               <a:t>我早上</a:t>
             </a:r>
-            <a:pPr algn="l" indent="0" marL="0">
-              <a:buNone/>
-            </a:pPr>
             <a:r>
               <a:rPr lang="en-US" sz="1300" b="1" dirty="0">
                 <a:solidFill>
@@ -9068,9 +8846,6 @@
               </a:rPr>
               <a:t>X</a:t>
             </a:r>
-            <a:pPr algn="l" indent="0" marL="0">
-              <a:buNone/>
-            </a:pPr>
             <a:r>
               <a:rPr lang="en-US" sz="1300" b="1" dirty="0">
                 <a:solidFill>
@@ -9082,9 +8857,6 @@
               </a:rPr>
               <a:t>点起床。</a:t>
             </a:r>
-            <a:pPr algn="l" indent="0" marL="0">
-              <a:buNone/>
-            </a:pPr>
             <a:r>
               <a:rPr lang="en-US" sz="1300" dirty="0">
                 <a:solidFill>
@@ -9096,9 +8868,6 @@
               </a:rPr>
               <a:t> </a:t>
             </a:r>
-            <a:pPr algn="l" indent="0" marL="0">
-              <a:buNone/>
-            </a:pPr>
             <a:r>
               <a:rPr lang="en-US" sz="1000" dirty="0">
                 <a:solidFill>
@@ -9127,9 +8896,6 @@
               </a:rPr>
               <a:t>我</a:t>
             </a:r>
-            <a:pPr algn="l" indent="0" marL="0">
-              <a:buNone/>
-            </a:pPr>
             <a:r>
               <a:rPr lang="en-US" sz="1300" b="1" dirty="0">
                 <a:solidFill>
@@ -9141,9 +8907,6 @@
               </a:rPr>
               <a:t>X</a:t>
             </a:r>
-            <a:pPr algn="l" indent="0" marL="0">
-              <a:buNone/>
-            </a:pPr>
             <a:r>
               <a:rPr lang="en-US" sz="1300" b="1" dirty="0">
                 <a:solidFill>
@@ -9155,9 +8918,6 @@
               </a:rPr>
               <a:t>点一刻去上学。</a:t>
             </a:r>
-            <a:pPr algn="l" indent="0" marL="0">
-              <a:buNone/>
-            </a:pPr>
             <a:r>
               <a:rPr lang="en-US" sz="1300" dirty="0">
                 <a:solidFill>
@@ -9169,9 +8929,6 @@
               </a:rPr>
               <a:t> </a:t>
             </a:r>
-            <a:pPr algn="l" indent="0" marL="0">
-              <a:buNone/>
-            </a:pPr>
             <a:r>
               <a:rPr lang="en-US" sz="1000" dirty="0">
                 <a:solidFill>
@@ -9200,9 +8957,6 @@
               </a:rPr>
               <a:t>我们</a:t>
             </a:r>
-            <a:pPr algn="l" indent="0" marL="0">
-              <a:buNone/>
-            </a:pPr>
             <a:r>
               <a:rPr lang="en-US" sz="1300" b="1" dirty="0">
                 <a:solidFill>
@@ -9214,9 +8968,6 @@
               </a:rPr>
               <a:t>X</a:t>
             </a:r>
-            <a:pPr algn="l" indent="0" marL="0">
-              <a:buNone/>
-            </a:pPr>
             <a:r>
               <a:rPr lang="en-US" sz="1300" b="1" dirty="0">
                 <a:solidFill>
@@ -9228,9 +8979,6 @@
               </a:rPr>
               <a:t>点上课。</a:t>
             </a:r>
-            <a:pPr algn="l" indent="0" marL="0">
-              <a:buNone/>
-            </a:pPr>
             <a:r>
               <a:rPr lang="en-US" sz="1300" dirty="0">
                 <a:solidFill>
@@ -9242,9 +8990,6 @@
               </a:rPr>
               <a:t> </a:t>
             </a:r>
-            <a:pPr algn="l" indent="0" marL="0">
-              <a:buNone/>
-            </a:pPr>
             <a:r>
               <a:rPr lang="en-US" sz="1000" dirty="0">
                 <a:solidFill>
@@ -9273,9 +9018,6 @@
               </a:rPr>
               <a:t>我们下午</a:t>
             </a:r>
-            <a:pPr algn="l" indent="0" marL="0">
-              <a:buNone/>
-            </a:pPr>
             <a:r>
               <a:rPr lang="en-US" sz="1300" b="1" dirty="0">
                 <a:solidFill>
@@ -9287,9 +9029,6 @@
               </a:rPr>
               <a:t>X</a:t>
             </a:r>
-            <a:pPr algn="l" indent="0" marL="0">
-              <a:buNone/>
-            </a:pPr>
             <a:r>
               <a:rPr lang="en-US" sz="1300" b="1" dirty="0">
                 <a:solidFill>
@@ -9301,9 +9040,6 @@
               </a:rPr>
               <a:t>点半放学。</a:t>
             </a:r>
-            <a:pPr algn="l" indent="0" marL="0">
-              <a:buNone/>
-            </a:pPr>
             <a:r>
               <a:rPr lang="en-US" sz="1300" dirty="0">
                 <a:solidFill>
@@ -9315,9 +9051,6 @@
               </a:rPr>
               <a:t> </a:t>
             </a:r>
-            <a:pPr algn="l" indent="0" marL="0">
-              <a:buNone/>
-            </a:pPr>
             <a:r>
               <a:rPr lang="en-US" sz="1000" dirty="0">
                 <a:solidFill>
@@ -9346,9 +9079,6 @@
               </a:rPr>
               <a:t>我晚上</a:t>
             </a:r>
-            <a:pPr algn="l" indent="0" marL="0">
-              <a:buNone/>
-            </a:pPr>
             <a:r>
               <a:rPr lang="en-US" sz="1300" b="1" dirty="0">
                 <a:solidFill>
@@ -9360,9 +9090,6 @@
               </a:rPr>
               <a:t>X</a:t>
             </a:r>
-            <a:pPr algn="l" indent="0" marL="0">
-              <a:buNone/>
-            </a:pPr>
             <a:r>
               <a:rPr lang="en-US" sz="1300" b="1" dirty="0">
                 <a:solidFill>
@@ -9374,9 +9101,6 @@
               </a:rPr>
               <a:t>点半睡觉。</a:t>
             </a:r>
-            <a:pPr algn="l" indent="0" marL="0">
-              <a:buNone/>
-            </a:pPr>
             <a:r>
               <a:rPr lang="en-US" sz="1300" dirty="0">
                 <a:solidFill>
@@ -9388,9 +9112,6 @@
               </a:rPr>
               <a:t> </a:t>
             </a:r>
-            <a:pPr algn="l" indent="0" marL="0">
-              <a:buNone/>
-            </a:pPr>
             <a:r>
               <a:rPr lang="en-US" sz="1000" dirty="0">
                 <a:solidFill>
@@ -9721,9 +9442,6 @@
               </a:rPr>
               <a:t>你早上几点起床？</a:t>
             </a:r>
-            <a:pPr algn="l" indent="0" marL="0">
-              <a:buNone/>
-            </a:pPr>
             <a:r>
               <a:rPr lang="en-US" sz="1100" dirty="0">
                 <a:solidFill>
@@ -9735,9 +9453,6 @@
               </a:rPr>
               <a:t> </a:t>
             </a:r>
-            <a:pPr algn="l" indent="0" marL="0">
-              <a:buNone/>
-            </a:pPr>
             <a:r>
               <a:rPr lang="en-US" sz="900" dirty="0">
                 <a:solidFill>
@@ -9766,9 +9481,6 @@
               </a:rPr>
               <a:t>你几点吃早饭？</a:t>
             </a:r>
-            <a:pPr algn="l" indent="0" marL="0">
-              <a:buNone/>
-            </a:pPr>
             <a:r>
               <a:rPr lang="en-US" sz="1100" dirty="0">
                 <a:solidFill>
@@ -9780,9 +9492,6 @@
               </a:rPr>
               <a:t> </a:t>
             </a:r>
-            <a:pPr algn="l" indent="0" marL="0">
-              <a:buNone/>
-            </a:pPr>
             <a:r>
               <a:rPr lang="en-US" sz="900" dirty="0">
                 <a:solidFill>
@@ -9811,9 +9520,6 @@
               </a:rPr>
               <a:t>你们下午几点放学？</a:t>
             </a:r>
-            <a:pPr algn="l" indent="0" marL="0">
-              <a:buNone/>
-            </a:pPr>
             <a:r>
               <a:rPr lang="en-US" sz="1100" dirty="0">
                 <a:solidFill>
@@ -9825,9 +9531,6 @@
               </a:rPr>
               <a:t> </a:t>
             </a:r>
-            <a:pPr algn="l" indent="0" marL="0">
-              <a:buNone/>
-            </a:pPr>
             <a:r>
               <a:rPr lang="en-US" sz="900" dirty="0">
                 <a:solidFill>
@@ -9856,9 +9559,6 @@
               </a:rPr>
               <a:t>你几点睡觉？</a:t>
             </a:r>
-            <a:pPr algn="l" indent="0" marL="0">
-              <a:buNone/>
-            </a:pPr>
             <a:r>
               <a:rPr lang="en-US" sz="1100" dirty="0">
                 <a:solidFill>
@@ -9870,9 +9570,6 @@
               </a:rPr>
               <a:t> </a:t>
             </a:r>
-            <a:pPr algn="l" indent="0" marL="0">
-              <a:buNone/>
-            </a:pPr>
             <a:r>
               <a:rPr lang="en-US" sz="900" dirty="0">
                 <a:solidFill>
@@ -10075,12 +9772,6 @@
               </a:rPr>
               <a:t>Replace the exact time with </a:t>
             </a:r>
-            <a:pPr algn="l" indent="0" marL="0">
-              <a:spcAft>
-                <a:spcPts val="600"/>
-              </a:spcAft>
-              <a:buNone/>
-            </a:pPr>
             <a:r>
               <a:rPr lang="en-US" sz="950" b="1" dirty="0">
                 <a:solidFill>
@@ -10092,12 +9783,6 @@
               </a:rPr>
               <a:t>几点</a:t>
             </a:r>
-            <a:pPr algn="l" indent="0" marL="0">
-              <a:spcAft>
-                <a:spcPts val="600"/>
-              </a:spcAft>
-              <a:buNone/>
-            </a:pPr>
             <a:r>
               <a:rPr lang="en-US" sz="950" dirty="0">
                 <a:solidFill>
@@ -10109,12 +9794,6 @@
               </a:rPr>
               <a:t>, and move </a:t>
             </a:r>
-            <a:pPr algn="l" indent="0" marL="0">
-              <a:spcAft>
-                <a:spcPts val="600"/>
-              </a:spcAft>
-              <a:buNone/>
-            </a:pPr>
             <a:r>
               <a:rPr lang="en-US" sz="950" b="1" dirty="0">
                 <a:solidFill>
@@ -10126,12 +9805,6 @@
               </a:rPr>
               <a:t>你</a:t>
             </a:r>
-            <a:pPr algn="l" indent="0" marL="0">
-              <a:spcAft>
-                <a:spcPts val="600"/>
-              </a:spcAft>
-              <a:buNone/>
-            </a:pPr>
             <a:r>
               <a:rPr lang="en-US" sz="950" dirty="0">
                 <a:solidFill>
@@ -10182,9 +9855,6 @@
               </a:rPr>
               <a:t>我早上六点半起床</a:t>
             </a:r>
-            <a:pPr algn="ctr" indent="0" marL="0">
-              <a:buNone/>
-            </a:pPr>
             <a:r>
               <a:rPr lang="en-US" sz="1200" dirty="0">
                 <a:solidFill>
@@ -10196,9 +9866,6 @@
               </a:rPr>
               <a:t> </a:t>
             </a:r>
-            <a:pPr algn="ctr" indent="0" marL="0">
-              <a:buNone/>
-            </a:pPr>
             <a:r>
               <a:rPr lang="en-US" sz="1200" b="1" dirty="0">
                 <a:solidFill>
@@ -10210,9 +9877,6 @@
               </a:rPr>
               <a:t>→</a:t>
             </a:r>
-            <a:pPr algn="ctr" indent="0" marL="0">
-              <a:buNone/>
-            </a:pPr>
             <a:r>
               <a:rPr lang="en-US" sz="1200" dirty="0">
                 <a:solidFill>
@@ -10224,9 +9888,6 @@
               </a:rPr>
               <a:t> 你早上</a:t>
             </a:r>
-            <a:pPr algn="ctr" indent="0" marL="0">
-              <a:buNone/>
-            </a:pPr>
             <a:r>
               <a:rPr lang="en-US" sz="1200" b="1" dirty="0">
                 <a:solidFill>
@@ -10238,9 +9899,6 @@
               </a:rPr>
               <a:t>几点</a:t>
             </a:r>
-            <a:pPr algn="ctr" indent="0" marL="0">
-              <a:buNone/>
-            </a:pPr>
             <a:r>
               <a:rPr lang="en-US" sz="1200" dirty="0">
                 <a:solidFill>
@@ -10410,12 +10068,6 @@
               </a:rPr>
               <a:t>他早上七点起床。 Only the </a:t>
             </a:r>
-            <a:pPr algn="l" indent="0" marL="0">
-              <a:spcBef>
-                <a:spcPts val="200"/>
-              </a:spcBef>
-              <a:buNone/>
-            </a:pPr>
             <a:r>
               <a:rPr lang="en-US" sz="850" b="1" dirty="0">
                 <a:solidFill>
@@ -10427,12 +10079,6 @@
               </a:rPr>
               <a:t>pronoun</a:t>
             </a:r>
-            <a:pPr algn="l" indent="0" marL="0">
-              <a:spcBef>
-                <a:spcPts val="200"/>
-              </a:spcBef>
-              <a:buNone/>
-            </a:pPr>
             <a:r>
               <a:rPr lang="en-US" sz="850" dirty="0">
                 <a:solidFill>
@@ -10802,9 +10448,6 @@
               </a:rPr>
               <a:t>Turn this into a question: </a:t>
             </a:r>
-            <a:pPr algn="l" indent="0" marL="0">
-              <a:buNone/>
-            </a:pPr>
             <a:r>
               <a:rPr lang="en-US" sz="1100" b="1" dirty="0">
                 <a:solidFill>
@@ -10816,9 +10459,6 @@
               </a:rPr>
               <a:t>我们下午三点半放学。</a:t>
             </a:r>
-            <a:pPr algn="l" indent="0" marL="0">
-              <a:buNone/>
-            </a:pPr>
             <a:r>
               <a:rPr lang="en-US" sz="1100" dirty="0">
                 <a:solidFill>
@@ -10940,9 +10580,6 @@
               </a:rPr>
               <a:t>What's </a:t>
             </a:r>
-            <a:pPr algn="l" indent="0" marL="0">
-              <a:buNone/>
-            </a:pPr>
             <a:r>
               <a:rPr lang="en-US" sz="1100" b="1" dirty="0">
                 <a:solidFill>
@@ -10954,9 +10591,6 @@
               </a:rPr>
               <a:t>wrong</a:t>
             </a:r>
-            <a:pPr algn="l" indent="0" marL="0">
-              <a:buNone/>
-            </a:pPr>
             <a:r>
               <a:rPr lang="en-US" sz="1100" dirty="0">
                 <a:solidFill>
@@ -10968,9 +10602,6 @@
               </a:rPr>
               <a:t> with this question: </a:t>
             </a:r>
-            <a:pPr algn="l" indent="0" marL="0">
-              <a:buNone/>
-            </a:pPr>
             <a:r>
               <a:rPr lang="en-US" sz="1100" b="1" dirty="0">
                 <a:solidFill>
@@ -10982,9 +10613,6 @@
               </a:rPr>
               <a:t>你几点起床几点？</a:t>
             </a:r>
-            <a:pPr algn="l" indent="0" marL="0">
-              <a:buNone/>
-            </a:pPr>
             <a:r>
               <a:rPr lang="en-US" sz="1100" dirty="0">
                 <a:solidFill>
@@ -11106,9 +10734,6 @@
               </a:rPr>
               <a:t>Teacher shows a picture — </a:t>
             </a:r>
-            <a:pPr algn="l" indent="0" marL="0">
-              <a:buNone/>
-            </a:pPr>
             <a:r>
               <a:rPr lang="en-US" sz="1100" b="1" dirty="0">
                 <a:solidFill>
@@ -11120,9 +10745,6 @@
               </a:rPr>
               <a:t>make a sentence!</a:t>
             </a:r>
-            <a:pPr algn="l" indent="0" marL="0">
-              <a:buNone/>
-            </a:pPr>
             <a:r>
               <a:rPr lang="en-US" sz="1100" dirty="0">
                 <a:solidFill>
@@ -11134,9 +10756,6 @@
               </a:rPr>
               <a:t> Write it and hold it up. </a:t>
             </a:r>
-            <a:pPr algn="l" indent="0" marL="0">
-              <a:buNone/>
-            </a:pPr>
             <a:r>
               <a:rPr lang="en-US" sz="1100" dirty="0">
                 <a:solidFill>
@@ -11732,9 +11351,6 @@
               </a:rPr>
               <a:t>Turn this into a question: </a:t>
             </a:r>
-            <a:pPr algn="l" indent="0" marL="0">
-              <a:buNone/>
-            </a:pPr>
             <a:r>
               <a:rPr lang="en-US" sz="1100" b="1" dirty="0">
                 <a:solidFill>
@@ -11895,9 +11511,6 @@
               </a:rPr>
               <a:t>What's </a:t>
             </a:r>
-            <a:pPr algn="l" indent="0" marL="0">
-              <a:buNone/>
-            </a:pPr>
             <a:r>
               <a:rPr lang="en-US" sz="1100" b="1" dirty="0">
                 <a:solidFill>
@@ -11909,9 +11522,6 @@
               </a:rPr>
               <a:t>wrong</a:t>
             </a:r>
-            <a:pPr algn="l" indent="0" marL="0">
-              <a:buNone/>
-            </a:pPr>
             <a:r>
               <a:rPr lang="en-US" sz="1100" dirty="0">
                 <a:solidFill>
@@ -11923,9 +11533,6 @@
               </a:rPr>
               <a:t> with: </a:t>
             </a:r>
-            <a:pPr algn="l" indent="0" marL="0">
-              <a:buNone/>
-            </a:pPr>
             <a:r>
               <a:rPr lang="en-US" sz="1100" b="1" dirty="0">
                 <a:solidFill>
@@ -11979,12 +11586,6 @@
               </a:rPr>
               <a:t>你几点起床几点？</a:t>
             </a:r>
-            <a:pPr algn="l" indent="0" marL="0">
-              <a:spcBef>
-                <a:spcPts val="200"/>
-              </a:spcBef>
-              <a:buNone/>
-            </a:pPr>
             <a:r>
               <a:rPr lang="en-US" sz="1000" dirty="0">
                 <a:solidFill>
@@ -11996,12 +11597,6 @@
               </a:rPr>
               <a:t> → </a:t>
             </a:r>
-            <a:pPr algn="l" indent="0" marL="0">
-              <a:spcBef>
-                <a:spcPts val="200"/>
-              </a:spcBef>
-              <a:buNone/>
-            </a:pPr>
             <a:r>
               <a:rPr lang="en-US" sz="1000" b="1" dirty="0">
                 <a:solidFill>
@@ -12775,9 +12370,6 @@
               </a:rPr>
               <a:t>我</a:t>
             </a:r>
-            <a:pPr algn="l" indent="0" marL="0">
-              <a:buNone/>
-            </a:pPr>
             <a:r>
               <a:rPr lang="en-US" sz="1500" b="1" dirty="0">
                 <a:solidFill>
@@ -12789,9 +12381,6 @@
               </a:rPr>
               <a:t>时间</a:t>
             </a:r>
-            <a:pPr algn="l" indent="0" marL="0">
-              <a:buNone/>
-            </a:pPr>
             <a:r>
               <a:rPr lang="en-US" sz="1500" dirty="0">
                 <a:solidFill>
@@ -12934,9 +12523,6 @@
               </a:rPr>
               <a:t>你</a:t>
             </a:r>
-            <a:pPr algn="l" indent="0" marL="0">
-              <a:buNone/>
-            </a:pPr>
             <a:r>
               <a:rPr lang="en-US" sz="1500" b="1" dirty="0">
                 <a:solidFill>
@@ -12948,9 +12534,6 @@
               </a:rPr>
               <a:t>几点</a:t>
             </a:r>
-            <a:pPr algn="l" indent="0" marL="0">
-              <a:buNone/>
-            </a:pPr>
             <a:r>
               <a:rPr lang="en-US" sz="1500" dirty="0">
                 <a:solidFill>
@@ -14669,9 +14252,6 @@
               </a:rPr>
               <a:t>他</a:t>
             </a:r>
-            <a:pPr algn="l" indent="0" marL="0">
-              <a:buNone/>
-            </a:pPr>
             <a:r>
               <a:rPr lang="en-US" sz="1100" b="1" dirty="0">
                 <a:solidFill>
@@ -14683,9 +14263,6 @@
               </a:rPr>
               <a:t>/她</a:t>
             </a:r>
-            <a:pPr algn="l" indent="0" marL="0">
-              <a:buNone/>
-            </a:pPr>
             <a:r>
               <a:rPr lang="en-US" sz="1100" dirty="0">
                 <a:solidFill>
